--- a/docs/slides/Interlinga.ai.pptx
+++ b/docs/slides/Interlinga.ai.pptx
@@ -14,6 +14,7 @@
     <p:sldId id="258" r:id="rId10"/>
     <p:sldId id="259" r:id="rId11"/>
     <p:sldId id="260" r:id="rId12"/>
+    <p:sldId id="263" r:id="rId15"/>
     <p:sldId id="261" r:id="rId13"/>
     <p:sldId id="262" r:id="rId14"/>
   </p:sldIdLst>
@@ -24840,6 +24841,1390 @@
 </p:sld>
 </file>
 
+<file path=ppt/slides/slide8.xml><?xml version="1.0" encoding="utf-8"?>
+<p:sld xmlns:a="http://schemas.openxmlformats.org/drawingml/2006/main" xmlns:p="http://schemas.openxmlformats.org/presentationml/2006/main" xmlns:r="http://schemas.openxmlformats.org/officeDocument/2006/relationships">
+  <p:cSld>
+    <p:spTree>
+      <p:nvGrpSpPr>
+        <p:cNvPr id="1" name=""/>
+        <p:cNvGrpSpPr/>
+        <p:nvPr/>
+      </p:nvGrpSpPr>
+      <p:grpSpPr/>
+      <p:sp>
+        <p:nvSpPr>
+          <p:cNvPr id="1000" name="Background 1000"/>
+          <p:cNvSpPr/>
+          <p:nvPr/>
+        </p:nvSpPr>
+        <p:spPr>
+          <a:xfrm>
+            <a:off x="0" y="0"/>
+            <a:ext cx="9144000" cy="5143500"/>
+          </a:xfrm>
+          <a:prstGeom prst="rect">
+            <a:avLst/>
+          </a:prstGeom>
+          <a:solidFill>
+            <a:srgbClr val="0D1117"/>
+          </a:solidFill>
+          <a:ln>
+            <a:noFill/>
+          </a:ln>
+        </p:spPr>
+        <p:txBody>
+          <a:bodyPr/>
+          <a:lstStyle/>
+          <a:p/>
+        </p:txBody>
+      </p:sp>
+      <p:sp>
+        <p:nvSpPr>
+          <p:cNvPr id="1001" name="Title 1001"/>
+          <p:cNvSpPr txBox="1"/>
+          <p:nvPr/>
+        </p:nvSpPr>
+        <p:spPr>
+          <a:xfrm>
+            <a:off x="411491" y="240030"/>
+            <a:ext cx="8298300" cy="423300"/>
+          </a:xfrm>
+          <a:prstGeom prst="rect">
+            <a:avLst/>
+          </a:prstGeom>
+          <a:noFill/>
+        </p:spPr>
+        <p:txBody>
+          <a:bodyPr anchorCtr="0" anchor="t" bIns="34275" lIns="68575" rIns="68575" tIns="34275" wrap="square">
+            <a:spAutoFit/>
+          </a:bodyPr>
+          <a:lstStyle/>
+          <a:p>
+            <a:pPr indent="0" lvl="0" marL="0" marR="0" algn="l">
+              <a:spcBef>
+                <a:spcPts val="0"/>
+              </a:spcBef>
+              <a:buNone/>
+            </a:pPr>
+            <a:r>
+              <a:rPr sz="2300" b="1" i="0" lang="en">
+                <a:solidFill>
+                  <a:srgbClr val="E6E9EF"/>
+                </a:solidFill>
+                <a:latin typeface="Arial"/>
+                <a:ea typeface="Arial"/>
+                <a:cs typeface="Arial"/>
+              </a:rPr>
+              <a:t>Interlinga.ai — Tech Architecture</a:t>
+            </a:r>
+          </a:p>
+        </p:txBody>
+      </p:sp>
+      <p:sp>
+        <p:nvSpPr>
+          <p:cNvPr id="1002" name="Underline 1002"/>
+          <p:cNvSpPr/>
+          <p:nvPr/>
+        </p:nvSpPr>
+        <p:spPr>
+          <a:xfrm>
+            <a:off x="411491" y="720090"/>
+            <a:ext cx="754400" cy="28575"/>
+          </a:xfrm>
+          <a:prstGeom prst="rect">
+            <a:avLst/>
+          </a:prstGeom>
+          <a:solidFill>
+            <a:srgbClr val="4F7FD1"/>
+          </a:solidFill>
+          <a:ln>
+            <a:noFill/>
+          </a:ln>
+        </p:spPr>
+        <p:txBody>
+          <a:bodyPr/>
+          <a:lstStyle/>
+          <a:p/>
+        </p:txBody>
+      </p:sp>
+      <p:sp>
+        <p:nvSpPr>
+          <p:cNvPr id="1003" name="Text 1003"/>
+          <p:cNvSpPr txBox="1"/>
+          <p:nvPr/>
+        </p:nvSpPr>
+        <p:spPr>
+          <a:xfrm>
+            <a:off x="411491" y="788665"/>
+            <a:ext cx="8298300" cy="230000"/>
+          </a:xfrm>
+          <a:prstGeom prst="rect">
+            <a:avLst/>
+          </a:prstGeom>
+          <a:noFill/>
+        </p:spPr>
+        <p:txBody>
+          <a:bodyPr wrap="square" anchor="t" lIns="0" rIns="0" tIns="0" bIns="0">
+            <a:noAutofit/>
+          </a:bodyPr>
+          <a:lstStyle/>
+          <a:p>
+            <a:pPr algn="l" indent="0" marL="0" marR="0"/>
+            <a:r>
+              <a:rPr sz="1100" b="0" i="0" lang="en">
+                <a:solidFill>
+                  <a:srgbClr val="8B93A3"/>
+                </a:solidFill>
+                <a:latin typeface="Arial"/>
+                <a:ea typeface="Arial"/>
+                <a:cs typeface="Arial"/>
+              </a:rPr>
+              <a:t>Every capability sits behind a provider interface. </a:t>
+            </a:r>
+            <a:r>
+              <a:rPr sz="1100" b="1" i="0" lang="en">
+                <a:solidFill>
+                  <a:srgbClr val="4FBF8F"/>
+                </a:solidFill>
+                <a:latin typeface="Arial"/>
+                <a:ea typeface="Arial"/>
+                <a:cs typeface="Arial"/>
+              </a:rPr>
+              <a:t>Self-hosted (local-inference)</a:t>
+            </a:r>
+            <a:r>
+              <a:rPr sz="1100" b="0" i="0" lang="en">
+                <a:solidFill>
+                  <a:srgbClr val="8B93A3"/>
+                </a:solidFill>
+                <a:latin typeface="Arial"/>
+                <a:ea typeface="Arial"/>
+                <a:cs typeface="Arial"/>
+              </a:rPr>
+              <a:t> is tried first; </a:t>
+            </a:r>
+            <a:r>
+              <a:rPr sz="1100" b="1" i="0" lang="en">
+                <a:solidFill>
+                  <a:srgbClr val="4F7FD1"/>
+                </a:solidFill>
+                <a:latin typeface="Arial"/>
+                <a:ea typeface="Arial"/>
+                <a:cs typeface="Arial"/>
+              </a:rPr>
+              <a:t>managed cloud APIs</a:t>
+            </a:r>
+            <a:r>
+              <a:rPr sz="1100" b="0" i="0" lang="en">
+                <a:solidFill>
+                  <a:srgbClr val="8B93A3"/>
+                </a:solidFill>
+                <a:latin typeface="Arial"/>
+                <a:ea typeface="Arial"/>
+                <a:cs typeface="Arial"/>
+              </a:rPr>
+              <a:t> are the automatic fallback.</a:t>
+            </a:r>
+          </a:p>
+        </p:txBody>
+      </p:sp>
+      <p:sp>
+        <p:nvSpPr>
+          <p:cNvPr id="1004" name="Card 1004"/>
+          <p:cNvSpPr/>
+          <p:nvPr/>
+        </p:nvSpPr>
+        <p:spPr>
+          <a:xfrm>
+            <a:off x="411491" y="1058665"/>
+            <a:ext cx="8298300" cy="420000"/>
+          </a:xfrm>
+          <a:prstGeom prst="roundRect">
+            <a:avLst>
+              <a:gd name="adj" fmla="val 8000"/>
+            </a:avLst>
+          </a:prstGeom>
+          <a:solidFill>
+            <a:srgbClr val="171D27"/>
+          </a:solidFill>
+          <a:ln w="12700">
+            <a:solidFill>
+              <a:srgbClr val="8B93A3"/>
+            </a:solidFill>
+          </a:ln>
+          <a:effectLst/>
+        </p:spPr>
+        <p:txBody>
+          <a:bodyPr rtlCol="0" anchor="ctr" wrap="square" lIns="45720" rIns="45720" tIns="18000" bIns="18000"/>
+          <a:lstStyle/>
+          <a:p>
+            <a:pPr algn="ctr" indent="0" marL="0" marR="0"/>
+            <a:r>
+              <a:rPr sz="1100" b="1" i="0" lang="en">
+                <a:solidFill>
+                  <a:srgbClr val="E6E9EF"/>
+                </a:solidFill>
+                <a:latin typeface="Arial"/>
+                <a:ea typeface="Arial"/>
+                <a:cs typeface="Arial"/>
+              </a:rPr>
+              <a:t>FACILITATOR / LEARNER BROWSER</a:t>
+            </a:r>
+          </a:p>
+          <a:p>
+            <a:pPr algn="ctr" indent="0" marL="0" marR="0">
+              <a:spcBef>
+                <a:spcPts val="200"/>
+              </a:spcBef>
+            </a:pPr>
+            <a:r>
+              <a:rPr sz="850" b="0" i="0" lang="en">
+                <a:solidFill>
+                  <a:srgbClr val="8B93A3"/>
+                </a:solidFill>
+                <a:latin typeface="Arial"/>
+                <a:ea typeface="Arial"/>
+                <a:cs typeface="Arial"/>
+              </a:rPr>
+              <a:t>Next.js (App Router) + TypeScript · LiveKit client SDK (mic/camera) · chat</a:t>
+            </a:r>
+          </a:p>
+        </p:txBody>
+      </p:sp>
+      <p:sp>
+        <p:nvSpPr>
+          <p:cNvPr id="1005" name="Chevron 1005"/>
+          <p:cNvSpPr/>
+          <p:nvPr/>
+        </p:nvSpPr>
+        <p:spPr>
+          <a:xfrm rot="5400000">
+            <a:off x="4495641" y="1483665"/>
+            <a:ext cx="130000" cy="130000"/>
+          </a:xfrm>
+          <a:prstGeom prst="chevron">
+            <a:avLst/>
+          </a:prstGeom>
+          <a:solidFill>
+            <a:srgbClr val="8B93A3"/>
+          </a:solidFill>
+          <a:ln>
+            <a:noFill/>
+          </a:ln>
+          <a:effectLst/>
+        </p:spPr>
+        <p:txBody>
+          <a:bodyPr rtlCol="0" anchor="ctr"/>
+          <a:lstStyle/>
+          <a:p>
+            <a:pPr algn="ctr"/>
+          </a:p>
+        </p:txBody>
+      </p:sp>
+      <p:sp>
+        <p:nvSpPr>
+          <p:cNvPr id="1006" name="Card 1006"/>
+          <p:cNvSpPr/>
+          <p:nvPr/>
+        </p:nvSpPr>
+        <p:spPr>
+          <a:xfrm>
+            <a:off x="411491" y="1618665"/>
+            <a:ext cx="4900000" cy="460000"/>
+          </a:xfrm>
+          <a:prstGeom prst="roundRect">
+            <a:avLst>
+              <a:gd name="adj" fmla="val 8000"/>
+            </a:avLst>
+          </a:prstGeom>
+          <a:solidFill>
+            <a:srgbClr val="171D27"/>
+          </a:solidFill>
+          <a:ln w="15875">
+            <a:solidFill>
+              <a:srgbClr val="C47CB8"/>
+            </a:solidFill>
+          </a:ln>
+          <a:effectLst/>
+        </p:spPr>
+        <p:txBody>
+          <a:bodyPr rtlCol="0" anchor="ctr" wrap="square" lIns="45720" rIns="45720" tIns="18000" bIns="18000"/>
+          <a:lstStyle/>
+          <a:p>
+            <a:pPr algn="ctr" indent="0" marL="0" marR="0"/>
+            <a:r>
+              <a:rPr sz="1100" b="1" i="0" lang="en">
+                <a:solidFill>
+                  <a:srgbClr val="E6E9EF"/>
+                </a:solidFill>
+                <a:latin typeface="Arial"/>
+                <a:ea typeface="Arial"/>
+                <a:cs typeface="Arial"/>
+              </a:rPr>
+              <a:t>LIVEKIT ROOM (WebRTC)</a:t>
+            </a:r>
+          </a:p>
+          <a:p>
+            <a:pPr algn="ctr" indent="0" marL="0" marR="0">
+              <a:spcBef>
+                <a:spcPts val="200"/>
+              </a:spcBef>
+            </a:pPr>
+            <a:r>
+              <a:rPr sz="850" b="0" i="0" lang="en">
+                <a:solidFill>
+                  <a:srgbClr val="8B93A3"/>
+                </a:solidFill>
+                <a:latin typeface="Arial"/>
+                <a:ea typeface="Arial"/>
+                <a:cs typeface="Arial"/>
+              </a:rPr>
+              <a:t>WebRTC audio/video · DataChannel carries the caption signal</a:t>
+            </a:r>
+          </a:p>
+        </p:txBody>
+      </p:sp>
+      <p:sp>
+        <p:nvSpPr>
+          <p:cNvPr id="1007" name="Card 1007"/>
+          <p:cNvSpPr/>
+          <p:nvPr/>
+        </p:nvSpPr>
+        <p:spPr>
+          <a:xfrm>
+            <a:off x="5401491" y="1618665"/>
+            <a:ext cx="3308300" cy="460000"/>
+          </a:xfrm>
+          <a:prstGeom prst="roundRect">
+            <a:avLst>
+              <a:gd name="adj" fmla="val 8000"/>
+            </a:avLst>
+          </a:prstGeom>
+          <a:solidFill>
+            <a:srgbClr val="171D27"/>
+          </a:solidFill>
+          <a:ln w="15875">
+            <a:solidFill>
+              <a:srgbClr val="4F7FD1"/>
+            </a:solidFill>
+          </a:ln>
+          <a:effectLst/>
+        </p:spPr>
+        <p:txBody>
+          <a:bodyPr rtlCol="0" anchor="ctr" wrap="square" lIns="45720" rIns="45720" tIns="18000" bIns="18000"/>
+          <a:lstStyle/>
+          <a:p>
+            <a:pPr algn="ctr" indent="0" marL="0" marR="0"/>
+            <a:r>
+              <a:rPr sz="1100" b="1" i="0" lang="en">
+                <a:solidFill>
+                  <a:srgbClr val="E6E9EF"/>
+                </a:solidFill>
+                <a:latin typeface="Arial"/>
+                <a:ea typeface="Arial"/>
+                <a:cs typeface="Arial"/>
+              </a:rPr>
+              <a:t>CAPTION AGENT WORKER</a:t>
+            </a:r>
+          </a:p>
+          <a:p>
+            <a:pPr algn="ctr" indent="0" marL="0" marR="0">
+              <a:spcBef>
+                <a:spcPts val="200"/>
+              </a:spcBef>
+            </a:pPr>
+            <a:r>
+              <a:rPr sz="850" b="0" i="0" lang="en">
+                <a:solidFill>
+                  <a:srgbClr val="8B93A3"/>
+                </a:solidFill>
+                <a:latin typeface="Arial"/>
+                <a:ea typeface="Arial"/>
+                <a:cs typeface="Arial"/>
+              </a:rPr>
+              <a:t>In-process LiveKit Agents job (server.ts)</a:t>
+            </a:r>
+          </a:p>
+        </p:txBody>
+      </p:sp>
+      <p:sp>
+        <p:nvSpPr>
+          <p:cNvPr id="1008" name="Chevron 1008"/>
+          <p:cNvSpPr/>
+          <p:nvPr/>
+        </p:nvSpPr>
+        <p:spPr>
+          <a:xfrm rot="5400000">
+            <a:off x="4495641" y="2083665"/>
+            <a:ext cx="130000" cy="130000"/>
+          </a:xfrm>
+          <a:prstGeom prst="chevron">
+            <a:avLst/>
+          </a:prstGeom>
+          <a:solidFill>
+            <a:srgbClr val="8B93A3"/>
+          </a:solidFill>
+          <a:ln>
+            <a:noFill/>
+          </a:ln>
+          <a:effectLst/>
+        </p:spPr>
+        <p:txBody>
+          <a:bodyPr rtlCol="0" anchor="ctr"/>
+          <a:lstStyle/>
+          <a:p>
+            <a:pPr algn="ctr"/>
+          </a:p>
+        </p:txBody>
+      </p:sp>
+      <p:sp>
+        <p:nvSpPr>
+          <p:cNvPr id="1009" name="Card 1009"/>
+          <p:cNvSpPr/>
+          <p:nvPr/>
+        </p:nvSpPr>
+        <p:spPr>
+          <a:xfrm>
+            <a:off x="411491" y="2218665"/>
+            <a:ext cx="2007075" cy="360000"/>
+          </a:xfrm>
+          <a:prstGeom prst="roundRect">
+            <a:avLst>
+              <a:gd name="adj" fmla="val 8000"/>
+            </a:avLst>
+          </a:prstGeom>
+          <a:solidFill>
+            <a:srgbClr val="171D27"/>
+          </a:solidFill>
+          <a:ln w="12700">
+            <a:solidFill>
+              <a:srgbClr val="8B93A3"/>
+            </a:solidFill>
+          </a:ln>
+          <a:effectLst/>
+        </p:spPr>
+        <p:txBody>
+          <a:bodyPr rtlCol="0" anchor="ctr" wrap="square" lIns="27432" rIns="27432" tIns="18000" bIns="18000"/>
+          <a:lstStyle/>
+          <a:p>
+            <a:pPr algn="ctr" indent="0" marL="0" marR="0"/>
+            <a:r>
+              <a:rPr sz="1000" b="1" i="0" lang="en">
+                <a:solidFill>
+                  <a:srgbClr val="E6E9EF"/>
+                </a:solidFill>
+                <a:latin typeface="Arial"/>
+                <a:ea typeface="Arial"/>
+                <a:cs typeface="Arial"/>
+              </a:rPr>
+              <a:t>SPEECH-TO-TEXT</a:t>
+            </a:r>
+          </a:p>
+        </p:txBody>
+      </p:sp>
+      <p:sp>
+        <p:nvSpPr>
+          <p:cNvPr id="1010" name="Card 1010"/>
+          <p:cNvSpPr/>
+          <p:nvPr/>
+        </p:nvSpPr>
+        <p:spPr>
+          <a:xfrm>
+            <a:off x="411491" y="2618665"/>
+            <a:ext cx="2007075" cy="360000"/>
+          </a:xfrm>
+          <a:prstGeom prst="roundRect">
+            <a:avLst>
+              <a:gd name="adj" fmla="val 10000"/>
+            </a:avLst>
+          </a:prstGeom>
+          <a:solidFill>
+            <a:srgbClr val="171D27"/>
+          </a:solidFill>
+          <a:ln w="12700">
+            <a:solidFill>
+              <a:srgbClr val="4FBF8F"/>
+            </a:solidFill>
+          </a:ln>
+          <a:effectLst/>
+        </p:spPr>
+        <p:txBody>
+          <a:bodyPr rtlCol="0" anchor="ctr" wrap="square" lIns="27432" rIns="27432" tIns="18000" bIns="18000"/>
+          <a:lstStyle/>
+          <a:p>
+            <a:pPr algn="ctr" indent="0" marL="0" marR="0"/>
+            <a:r>
+              <a:rPr sz="1000" b="1" i="0" lang="en">
+                <a:solidFill>
+                  <a:srgbClr val="4FBF8F"/>
+                </a:solidFill>
+                <a:latin typeface="Arial"/>
+                <a:ea typeface="Arial"/>
+                <a:cs typeface="Arial"/>
+              </a:rPr>
+              <a:t>faster-whisper</a:t>
+            </a:r>
+          </a:p>
+          <a:p>
+            <a:pPr algn="ctr" indent="0" marL="0" marR="0">
+              <a:spcBef>
+                <a:spcPts val="150"/>
+              </a:spcBef>
+            </a:pPr>
+            <a:r>
+              <a:rPr sz="820" b="0" i="0" lang="en">
+                <a:solidFill>
+                  <a:srgbClr val="8B93A3"/>
+                </a:solidFill>
+                <a:latin typeface="Arial"/>
+                <a:ea typeface="Arial"/>
+                <a:cs typeface="Arial"/>
+              </a:rPr>
+              <a:t>local-inference · tried first</a:t>
+            </a:r>
+          </a:p>
+        </p:txBody>
+      </p:sp>
+      <p:sp>
+        <p:nvSpPr>
+          <p:cNvPr id="1011" name="Card 1011"/>
+          <p:cNvSpPr/>
+          <p:nvPr/>
+        </p:nvSpPr>
+        <p:spPr>
+          <a:xfrm>
+            <a:off x="411491" y="3018665"/>
+            <a:ext cx="2007075" cy="360000"/>
+          </a:xfrm>
+          <a:prstGeom prst="roundRect">
+            <a:avLst>
+              <a:gd name="adj" fmla="val 10000"/>
+            </a:avLst>
+          </a:prstGeom>
+          <a:solidFill>
+            <a:srgbClr val="171D27"/>
+          </a:solidFill>
+          <a:ln w="12700">
+            <a:solidFill>
+              <a:srgbClr val="4F7FD1"/>
+            </a:solidFill>
+          </a:ln>
+          <a:effectLst/>
+        </p:spPr>
+        <p:txBody>
+          <a:bodyPr rtlCol="0" anchor="ctr" wrap="square" lIns="27432" rIns="27432" tIns="18000" bIns="18000"/>
+          <a:lstStyle/>
+          <a:p>
+            <a:pPr algn="ctr" indent="0" marL="0" marR="0"/>
+            <a:r>
+              <a:rPr sz="1000" b="1" i="0" lang="en">
+                <a:solidFill>
+                  <a:srgbClr val="4F7FD1"/>
+                </a:solidFill>
+                <a:latin typeface="Arial"/>
+                <a:ea typeface="Arial"/>
+                <a:cs typeface="Arial"/>
+              </a:rPr>
+              <a:t>Deepgram Nova-3</a:t>
+            </a:r>
+          </a:p>
+          <a:p>
+            <a:pPr algn="ctr" indent="0" marL="0" marR="0">
+              <a:spcBef>
+                <a:spcPts val="150"/>
+              </a:spcBef>
+            </a:pPr>
+            <a:r>
+              <a:rPr sz="820" b="0" i="0" lang="en">
+                <a:solidFill>
+                  <a:srgbClr val="8B93A3"/>
+                </a:solidFill>
+                <a:latin typeface="Arial"/>
+                <a:ea typeface="Arial"/>
+                <a:cs typeface="Arial"/>
+              </a:rPr>
+              <a:t>cloud fallback · diarized</a:t>
+            </a:r>
+          </a:p>
+        </p:txBody>
+      </p:sp>
+      <p:sp>
+        <p:nvSpPr>
+          <p:cNvPr id="1012" name="Card 1012"/>
+          <p:cNvSpPr/>
+          <p:nvPr/>
+        </p:nvSpPr>
+        <p:spPr>
+          <a:xfrm>
+            <a:off x="2508566" y="2218665"/>
+            <a:ext cx="2007075" cy="360000"/>
+          </a:xfrm>
+          <a:prstGeom prst="roundRect">
+            <a:avLst>
+              <a:gd name="adj" fmla="val 8000"/>
+            </a:avLst>
+          </a:prstGeom>
+          <a:solidFill>
+            <a:srgbClr val="171D27"/>
+          </a:solidFill>
+          <a:ln w="12700">
+            <a:solidFill>
+              <a:srgbClr val="8B93A3"/>
+            </a:solidFill>
+          </a:ln>
+          <a:effectLst/>
+        </p:spPr>
+        <p:txBody>
+          <a:bodyPr rtlCol="0" anchor="ctr" wrap="square" lIns="27432" rIns="27432" tIns="18000" bIns="18000"/>
+          <a:lstStyle/>
+          <a:p>
+            <a:pPr algn="ctr" indent="0" marL="0" marR="0"/>
+            <a:r>
+              <a:rPr sz="1000" b="1" i="0" lang="en">
+                <a:solidFill>
+                  <a:srgbClr val="E6E9EF"/>
+                </a:solidFill>
+                <a:latin typeface="Arial"/>
+                <a:ea typeface="Arial"/>
+                <a:cs typeface="Arial"/>
+              </a:rPr>
+              <a:t>TRANSLATION</a:t>
+            </a:r>
+          </a:p>
+        </p:txBody>
+      </p:sp>
+      <p:sp>
+        <p:nvSpPr>
+          <p:cNvPr id="1013" name="Card 1013"/>
+          <p:cNvSpPr/>
+          <p:nvPr/>
+        </p:nvSpPr>
+        <p:spPr>
+          <a:xfrm>
+            <a:off x="2508566" y="2618665"/>
+            <a:ext cx="2007075" cy="360000"/>
+          </a:xfrm>
+          <a:prstGeom prst="roundRect">
+            <a:avLst>
+              <a:gd name="adj" fmla="val 10000"/>
+            </a:avLst>
+          </a:prstGeom>
+          <a:solidFill>
+            <a:srgbClr val="171D27"/>
+          </a:solidFill>
+          <a:ln w="12700">
+            <a:solidFill>
+              <a:srgbClr val="4FBF8F"/>
+            </a:solidFill>
+          </a:ln>
+          <a:effectLst/>
+        </p:spPr>
+        <p:txBody>
+          <a:bodyPr rtlCol="0" anchor="ctr" wrap="square" lIns="27432" rIns="27432" tIns="18000" bIns="18000"/>
+          <a:lstStyle/>
+          <a:p>
+            <a:pPr algn="ctr" indent="0" marL="0" marR="0"/>
+            <a:r>
+              <a:rPr sz="1000" b="1" i="0" lang="en">
+                <a:solidFill>
+                  <a:srgbClr val="4FBF8F"/>
+                </a:solidFill>
+                <a:latin typeface="Arial"/>
+                <a:ea typeface="Arial"/>
+                <a:cs typeface="Arial"/>
+              </a:rPr>
+              <a:t>NLLB-600M</a:t>
+            </a:r>
+          </a:p>
+          <a:p>
+            <a:pPr algn="ctr" indent="0" marL="0" marR="0">
+              <a:spcBef>
+                <a:spcPts val="150"/>
+              </a:spcBef>
+            </a:pPr>
+            <a:r>
+              <a:rPr sz="820" b="0" i="0" lang="en">
+                <a:solidFill>
+                  <a:srgbClr val="8B93A3"/>
+                </a:solidFill>
+                <a:latin typeface="Arial"/>
+                <a:ea typeface="Arial"/>
+                <a:cs typeface="Arial"/>
+              </a:rPr>
+              <a:t>local-inference · tried first</a:t>
+            </a:r>
+          </a:p>
+        </p:txBody>
+      </p:sp>
+      <p:sp>
+        <p:nvSpPr>
+          <p:cNvPr id="1014" name="Card 1014"/>
+          <p:cNvSpPr/>
+          <p:nvPr/>
+        </p:nvSpPr>
+        <p:spPr>
+          <a:xfrm>
+            <a:off x="2508566" y="3018665"/>
+            <a:ext cx="2007075" cy="360000"/>
+          </a:xfrm>
+          <a:prstGeom prst="roundRect">
+            <a:avLst>
+              <a:gd name="adj" fmla="val 10000"/>
+            </a:avLst>
+          </a:prstGeom>
+          <a:solidFill>
+            <a:srgbClr val="171D27"/>
+          </a:solidFill>
+          <a:ln w="12700">
+            <a:solidFill>
+              <a:srgbClr val="4F7FD1"/>
+            </a:solidFill>
+          </a:ln>
+          <a:effectLst/>
+        </p:spPr>
+        <p:txBody>
+          <a:bodyPr rtlCol="0" anchor="ctr" wrap="square" lIns="27432" rIns="27432" tIns="18000" bIns="18000"/>
+          <a:lstStyle/>
+          <a:p>
+            <a:pPr algn="ctr" indent="0" marL="0" marR="0"/>
+            <a:r>
+              <a:rPr sz="1000" b="1" i="0" lang="en">
+                <a:solidFill>
+                  <a:srgbClr val="4F7FD1"/>
+                </a:solidFill>
+                <a:latin typeface="Arial"/>
+                <a:ea typeface="Arial"/>
+                <a:cs typeface="Arial"/>
+              </a:rPr>
+              <a:t>Claude Haiku</a:t>
+            </a:r>
+          </a:p>
+          <a:p>
+            <a:pPr algn="ctr" indent="0" marL="0" marR="0">
+              <a:spcBef>
+                <a:spcPts val="150"/>
+              </a:spcBef>
+            </a:pPr>
+            <a:r>
+              <a:rPr sz="820" b="0" i="0" lang="en">
+                <a:solidFill>
+                  <a:srgbClr val="8B93A3"/>
+                </a:solidFill>
+                <a:latin typeface="Arial"/>
+                <a:ea typeface="Arial"/>
+                <a:cs typeface="Arial"/>
+              </a:rPr>
+              <a:t>cloud fallback</a:t>
+            </a:r>
+          </a:p>
+        </p:txBody>
+      </p:sp>
+      <p:sp>
+        <p:nvSpPr>
+          <p:cNvPr id="1015" name="Card 1015"/>
+          <p:cNvSpPr/>
+          <p:nvPr/>
+        </p:nvSpPr>
+        <p:spPr>
+          <a:xfrm>
+            <a:off x="4605641" y="2218665"/>
+            <a:ext cx="2007075" cy="360000"/>
+          </a:xfrm>
+          <a:prstGeom prst="roundRect">
+            <a:avLst>
+              <a:gd name="adj" fmla="val 8000"/>
+            </a:avLst>
+          </a:prstGeom>
+          <a:solidFill>
+            <a:srgbClr val="171D27"/>
+          </a:solidFill>
+          <a:ln w="12700">
+            <a:solidFill>
+              <a:srgbClr val="8B93A3"/>
+            </a:solidFill>
+          </a:ln>
+          <a:effectLst/>
+        </p:spPr>
+        <p:txBody>
+          <a:bodyPr rtlCol="0" anchor="ctr" wrap="square" lIns="27432" rIns="27432" tIns="18000" bIns="18000"/>
+          <a:lstStyle/>
+          <a:p>
+            <a:pPr algn="ctr" indent="0" marL="0" marR="0"/>
+            <a:r>
+              <a:rPr sz="1000" b="1" i="0" lang="en">
+                <a:solidFill>
+                  <a:srgbClr val="E6E9EF"/>
+                </a:solidFill>
+                <a:latin typeface="Arial"/>
+                <a:ea typeface="Arial"/>
+                <a:cs typeface="Arial"/>
+              </a:rPr>
+              <a:t>INSIGHT LAYER</a:t>
+            </a:r>
+          </a:p>
+        </p:txBody>
+      </p:sp>
+      <p:sp>
+        <p:nvSpPr>
+          <p:cNvPr id="1016" name="Card 1016"/>
+          <p:cNvSpPr/>
+          <p:nvPr/>
+        </p:nvSpPr>
+        <p:spPr>
+          <a:xfrm>
+            <a:off x="4605641" y="2618665"/>
+            <a:ext cx="2007075" cy="760000"/>
+          </a:xfrm>
+          <a:prstGeom prst="roundRect">
+            <a:avLst>
+              <a:gd name="adj" fmla="val 8000"/>
+            </a:avLst>
+          </a:prstGeom>
+          <a:solidFill>
+            <a:srgbClr val="171D27"/>
+          </a:solidFill>
+          <a:ln w="12700">
+            <a:solidFill>
+              <a:srgbClr val="4F7FD1"/>
+            </a:solidFill>
+          </a:ln>
+          <a:effectLst/>
+        </p:spPr>
+        <p:txBody>
+          <a:bodyPr rtlCol="0" anchor="ctr" wrap="square" lIns="27432" rIns="27432" tIns="18000" bIns="18000"/>
+          <a:lstStyle/>
+          <a:p>
+            <a:pPr algn="ctr" indent="0" marL="0" marR="0"/>
+            <a:r>
+              <a:rPr sz="1000" b="1" i="0" lang="en">
+                <a:solidFill>
+                  <a:srgbClr val="4F7FD1"/>
+                </a:solidFill>
+                <a:latin typeface="Arial"/>
+                <a:ea typeface="Arial"/>
+                <a:cs typeface="Arial"/>
+              </a:rPr>
+              <a:t>Claude</a:t>
+            </a:r>
+          </a:p>
+          <a:p>
+            <a:pPr algn="ctr" indent="0" marL="0" marR="0">
+              <a:spcBef>
+                <a:spcPts val="150"/>
+              </a:spcBef>
+            </a:pPr>
+            <a:r>
+              <a:rPr sz="820" b="0" i="0" lang="en">
+                <a:solidFill>
+                  <a:srgbClr val="8B93A3"/>
+                </a:solidFill>
+                <a:latin typeface="Arial"/>
+                <a:ea typeface="Arial"/>
+                <a:cs typeface="Arial"/>
+              </a:rPr>
+              <a:t>prompt-cached over the transcript · citation-checked before display</a:t>
+            </a:r>
+          </a:p>
+        </p:txBody>
+      </p:sp>
+      <p:sp>
+        <p:nvSpPr>
+          <p:cNvPr id="1017" name="Card 1017"/>
+          <p:cNvSpPr/>
+          <p:nvPr/>
+        </p:nvSpPr>
+        <p:spPr>
+          <a:xfrm>
+            <a:off x="6702716" y="2218665"/>
+            <a:ext cx="2007075" cy="360000"/>
+          </a:xfrm>
+          <a:prstGeom prst="roundRect">
+            <a:avLst>
+              <a:gd name="adj" fmla="val 8000"/>
+            </a:avLst>
+          </a:prstGeom>
+          <a:solidFill>
+            <a:srgbClr val="171D27"/>
+          </a:solidFill>
+          <a:ln w="12700">
+            <a:solidFill>
+              <a:srgbClr val="8B93A3"/>
+            </a:solidFill>
+          </a:ln>
+          <a:effectLst/>
+        </p:spPr>
+        <p:txBody>
+          <a:bodyPr rtlCol="0" anchor="ctr" wrap="square" lIns="27432" rIns="27432" tIns="18000" bIns="18000"/>
+          <a:lstStyle/>
+          <a:p>
+            <a:pPr algn="ctr" indent="0" marL="0" marR="0"/>
+            <a:r>
+              <a:rPr sz="1000" b="1" i="0" lang="en">
+                <a:solidFill>
+                  <a:srgbClr val="E6E9EF"/>
+                </a:solidFill>
+                <a:latin typeface="Arial"/>
+                <a:ea typeface="Arial"/>
+                <a:cs typeface="Arial"/>
+              </a:rPr>
+              <a:t>TEXT-TO-SPEECH (opt-in)</a:t>
+            </a:r>
+          </a:p>
+        </p:txBody>
+      </p:sp>
+      <p:sp>
+        <p:nvSpPr>
+          <p:cNvPr id="1018" name="Card 1018"/>
+          <p:cNvSpPr/>
+          <p:nvPr/>
+        </p:nvSpPr>
+        <p:spPr>
+          <a:xfrm>
+            <a:off x="6702716" y="2618665"/>
+            <a:ext cx="2007075" cy="360000"/>
+          </a:xfrm>
+          <a:prstGeom prst="roundRect">
+            <a:avLst>
+              <a:gd name="adj" fmla="val 10000"/>
+            </a:avLst>
+          </a:prstGeom>
+          <a:solidFill>
+            <a:srgbClr val="171D27"/>
+          </a:solidFill>
+          <a:ln w="12700">
+            <a:solidFill>
+              <a:srgbClr val="4FBF8F"/>
+            </a:solidFill>
+          </a:ln>
+          <a:effectLst/>
+        </p:spPr>
+        <p:txBody>
+          <a:bodyPr rtlCol="0" anchor="ctr" wrap="square" lIns="27432" rIns="27432" tIns="18000" bIns="18000"/>
+          <a:lstStyle/>
+          <a:p>
+            <a:pPr algn="ctr" indent="0" marL="0" marR="0"/>
+            <a:r>
+              <a:rPr sz="1000" b="1" i="0" lang="en">
+                <a:solidFill>
+                  <a:srgbClr val="4FBF8F"/>
+                </a:solidFill>
+                <a:latin typeface="Arial"/>
+                <a:ea typeface="Arial"/>
+                <a:cs typeface="Arial"/>
+              </a:rPr>
+              <a:t>Piper</a:t>
+            </a:r>
+          </a:p>
+          <a:p>
+            <a:pPr algn="ctr" indent="0" marL="0" marR="0">
+              <a:spcBef>
+                <a:spcPts val="150"/>
+              </a:spcBef>
+            </a:pPr>
+            <a:r>
+              <a:rPr sz="820" b="0" i="0" lang="en">
+                <a:solidFill>
+                  <a:srgbClr val="8B93A3"/>
+                </a:solidFill>
+                <a:latin typeface="Arial"/>
+                <a:ea typeface="Arial"/>
+                <a:cs typeface="Arial"/>
+              </a:rPr>
+              <a:t>local-inference · tried first</a:t>
+            </a:r>
+          </a:p>
+        </p:txBody>
+      </p:sp>
+      <p:sp>
+        <p:nvSpPr>
+          <p:cNvPr id="1019" name="Card 1019"/>
+          <p:cNvSpPr/>
+          <p:nvPr/>
+        </p:nvSpPr>
+        <p:spPr>
+          <a:xfrm>
+            <a:off x="6702716" y="3018665"/>
+            <a:ext cx="2007075" cy="360000"/>
+          </a:xfrm>
+          <a:prstGeom prst="roundRect">
+            <a:avLst>
+              <a:gd name="adj" fmla="val 10000"/>
+            </a:avLst>
+          </a:prstGeom>
+          <a:solidFill>
+            <a:srgbClr val="171D27"/>
+          </a:solidFill>
+          <a:ln w="12700">
+            <a:solidFill>
+              <a:srgbClr val="4F7FD1"/>
+            </a:solidFill>
+          </a:ln>
+          <a:effectLst/>
+        </p:spPr>
+        <p:txBody>
+          <a:bodyPr rtlCol="0" anchor="ctr" wrap="square" lIns="27432" rIns="27432" tIns="18000" bIns="18000"/>
+          <a:lstStyle/>
+          <a:p>
+            <a:pPr algn="ctr" indent="0" marL="0" marR="0"/>
+            <a:r>
+              <a:rPr sz="1000" b="1" i="0" lang="en">
+                <a:solidFill>
+                  <a:srgbClr val="4F7FD1"/>
+                </a:solidFill>
+                <a:latin typeface="Arial"/>
+                <a:ea typeface="Arial"/>
+                <a:cs typeface="Arial"/>
+              </a:rPr>
+              <a:t>ElevenLabs</a:t>
+            </a:r>
+          </a:p>
+          <a:p>
+            <a:pPr algn="ctr" indent="0" marL="0" marR="0">
+              <a:spcBef>
+                <a:spcPts val="150"/>
+              </a:spcBef>
+            </a:pPr>
+            <a:r>
+              <a:rPr sz="820" b="0" i="0" lang="en">
+                <a:solidFill>
+                  <a:srgbClr val="8B93A3"/>
+                </a:solidFill>
+                <a:latin typeface="Arial"/>
+                <a:ea typeface="Arial"/>
+                <a:cs typeface="Arial"/>
+              </a:rPr>
+              <a:t>cloud fallback</a:t>
+            </a:r>
+          </a:p>
+        </p:txBody>
+      </p:sp>
+      <p:sp>
+        <p:nvSpPr>
+          <p:cNvPr id="1020" name="Chevron 1020"/>
+          <p:cNvSpPr/>
+          <p:nvPr/>
+        </p:nvSpPr>
+        <p:spPr>
+          <a:xfrm rot="5400000">
+            <a:off x="4495641" y="3383665"/>
+            <a:ext cx="130000" cy="130000"/>
+          </a:xfrm>
+          <a:prstGeom prst="chevron">
+            <a:avLst/>
+          </a:prstGeom>
+          <a:solidFill>
+            <a:srgbClr val="8B93A3"/>
+          </a:solidFill>
+          <a:ln>
+            <a:noFill/>
+          </a:ln>
+          <a:effectLst/>
+        </p:spPr>
+        <p:txBody>
+          <a:bodyPr rtlCol="0" anchor="ctr"/>
+          <a:lstStyle/>
+          <a:p>
+            <a:pPr algn="ctr"/>
+          </a:p>
+        </p:txBody>
+      </p:sp>
+      <p:sp>
+        <p:nvSpPr>
+          <p:cNvPr id="1021" name="Card 1021"/>
+          <p:cNvSpPr/>
+          <p:nvPr/>
+        </p:nvSpPr>
+        <p:spPr>
+          <a:xfrm>
+            <a:off x="411491" y="3518665"/>
+            <a:ext cx="4104150" cy="460000"/>
+          </a:xfrm>
+          <a:prstGeom prst="roundRect">
+            <a:avLst>
+              <a:gd name="adj" fmla="val 8000"/>
+            </a:avLst>
+          </a:prstGeom>
+          <a:solidFill>
+            <a:srgbClr val="171D27"/>
+          </a:solidFill>
+          <a:ln w="12700">
+            <a:solidFill>
+              <a:srgbClr val="8B93A3"/>
+            </a:solidFill>
+          </a:ln>
+          <a:effectLst/>
+        </p:spPr>
+        <p:txBody>
+          <a:bodyPr rtlCol="0" anchor="ctr" wrap="square" lIns="45720" rIns="45720" tIns="18000" bIns="18000"/>
+          <a:lstStyle/>
+          <a:p>
+            <a:pPr algn="ctr" indent="0" marL="0" marR="0"/>
+            <a:r>
+              <a:rPr sz="1100" b="1" i="0" lang="en">
+                <a:solidFill>
+                  <a:srgbClr val="E6E9EF"/>
+                </a:solidFill>
+                <a:latin typeface="Arial"/>
+                <a:ea typeface="Arial"/>
+                <a:cs typeface="Arial"/>
+              </a:rPr>
+              <a:t>POSTGRESQL (via Prisma)</a:t>
+            </a:r>
+          </a:p>
+          <a:p>
+            <a:pPr algn="ctr" indent="0" marL="0" marR="0">
+              <a:spcBef>
+                <a:spcPts val="200"/>
+              </a:spcBef>
+            </a:pPr>
+            <a:r>
+              <a:rPr sz="850" b="0" i="0" lang="en">
+                <a:solidFill>
+                  <a:srgbClr val="8B93A3"/>
+                </a:solidFill>
+                <a:latin typeface="Arial"/>
+                <a:ea typeface="Arial"/>
+                <a:cs typeface="Arial"/>
+              </a:rPr>
+              <a:t>sessions · transcript · chat/translations · insights (Railway)</a:t>
+            </a:r>
+          </a:p>
+        </p:txBody>
+      </p:sp>
+      <p:sp>
+        <p:nvSpPr>
+          <p:cNvPr id="1022" name="Card 1022"/>
+          <p:cNvSpPr/>
+          <p:nvPr/>
+        </p:nvSpPr>
+        <p:spPr>
+          <a:xfrm>
+            <a:off x="4605641" y="3518665"/>
+            <a:ext cx="4104150" cy="460000"/>
+          </a:xfrm>
+          <a:prstGeom prst="roundRect">
+            <a:avLst>
+              <a:gd name="adj" fmla="val 8000"/>
+            </a:avLst>
+          </a:prstGeom>
+          <a:solidFill>
+            <a:srgbClr val="171D27"/>
+          </a:solidFill>
+          <a:ln w="12700">
+            <a:solidFill>
+              <a:srgbClr val="8B93A3"/>
+            </a:solidFill>
+          </a:ln>
+          <a:effectLst/>
+        </p:spPr>
+        <p:txBody>
+          <a:bodyPr rtlCol="0" anchor="ctr" wrap="square" lIns="45720" rIns="45720" tIns="18000" bIns="18000"/>
+          <a:lstStyle/>
+          <a:p>
+            <a:pPr algn="ctr" indent="0" marL="0" marR="0"/>
+            <a:r>
+              <a:rPr sz="1100" b="1" i="0" lang="en">
+                <a:solidFill>
+                  <a:srgbClr val="E6E9EF"/>
+                </a:solidFill>
+                <a:latin typeface="Arial"/>
+                <a:ea typeface="Arial"/>
+                <a:cs typeface="Arial"/>
+              </a:rPr>
+              <a:t>FACILITATOR DASHBOARD</a:t>
+            </a:r>
+          </a:p>
+          <a:p>
+            <a:pPr algn="ctr" indent="0" marL="0" marR="0">
+              <a:spcBef>
+                <a:spcPts val="200"/>
+              </a:spcBef>
+            </a:pPr>
+            <a:r>
+              <a:rPr sz="850" b="0" i="0" lang="en">
+                <a:solidFill>
+                  <a:srgbClr val="8B93A3"/>
+                </a:solidFill>
+                <a:latin typeface="Arial"/>
+                <a:ea typeface="Arial"/>
+                <a:cs typeface="Arial"/>
+              </a:rPr>
+              <a:t>goal · activity · decisions · blockers, citation-checked</a:t>
+            </a:r>
+          </a:p>
+        </p:txBody>
+      </p:sp>
+      <p:sp>
+        <p:nvSpPr>
+          <p:cNvPr id="1023" name="Card 1023"/>
+          <p:cNvSpPr/>
+          <p:nvPr/>
+        </p:nvSpPr>
+        <p:spPr>
+          <a:xfrm>
+            <a:off x="411491" y="4028665"/>
+            <a:ext cx="4104150" cy="860000"/>
+          </a:xfrm>
+          <a:prstGeom prst="roundRect">
+            <a:avLst>
+              <a:gd name="adj" fmla="val 6000"/>
+            </a:avLst>
+          </a:prstGeom>
+          <a:solidFill>
+            <a:srgbClr val="10141B"/>
+          </a:solidFill>
+          <a:ln w="15875">
+            <a:solidFill>
+              <a:srgbClr val="4F7FD1"/>
+            </a:solidFill>
+          </a:ln>
+          <a:effectLst/>
+        </p:spPr>
+        <p:txBody>
+          <a:bodyPr rtlCol="0" anchor="ctr" wrap="square" lIns="45720" rIns="45720" tIns="18000" bIns="18000"/>
+          <a:lstStyle/>
+          <a:p>
+            <a:pPr algn="ctr" indent="0" marL="0" marR="0"/>
+            <a:r>
+              <a:rPr sz="1100" b="1" i="0" lang="en">
+                <a:solidFill>
+                  <a:srgbClr val="4F7FD1"/>
+                </a:solidFill>
+                <a:latin typeface="Arial"/>
+                <a:ea typeface="Arial"/>
+                <a:cs typeface="Arial"/>
+              </a:rPr>
+              <a:t>web — Railway service</a:t>
+            </a:r>
+          </a:p>
+          <a:p>
+            <a:pPr algn="ctr" indent="0" marL="0" marR="0">
+              <a:spcBef>
+                <a:spcPts val="200"/>
+              </a:spcBef>
+            </a:pPr>
+            <a:r>
+              <a:rPr sz="850" b="0" i="0" lang="en">
+                <a:solidFill>
+                  <a:srgbClr val="E6E9EF"/>
+                </a:solidFill>
+                <a:latin typeface="Arial"/>
+                <a:ea typeface="Arial"/>
+                <a:cs typeface="Arial"/>
+              </a:rPr>
+              <a:t>Next.js app + in-process LiveKit caption worker (server.ts) · holds the only DATABASE_URL</a:t>
+            </a:r>
+          </a:p>
+        </p:txBody>
+      </p:sp>
+      <p:sp>
+        <p:nvSpPr>
+          <p:cNvPr id="1024" name="Card 1024"/>
+          <p:cNvSpPr/>
+          <p:nvPr/>
+        </p:nvSpPr>
+        <p:spPr>
+          <a:xfrm>
+            <a:off x="4605641" y="4028665"/>
+            <a:ext cx="4104150" cy="860000"/>
+          </a:xfrm>
+          <a:prstGeom prst="roundRect">
+            <a:avLst>
+              <a:gd name="adj" fmla="val 6000"/>
+            </a:avLst>
+          </a:prstGeom>
+          <a:solidFill>
+            <a:srgbClr val="10141B"/>
+          </a:solidFill>
+          <a:ln w="15875">
+            <a:solidFill>
+              <a:srgbClr val="4FBF8F"/>
+            </a:solidFill>
+          </a:ln>
+          <a:effectLst/>
+        </p:spPr>
+        <p:txBody>
+          <a:bodyPr rtlCol="0" anchor="ctr" wrap="square" lIns="45720" rIns="45720" tIns="18000" bIns="18000"/>
+          <a:lstStyle/>
+          <a:p>
+            <a:pPr algn="ctr" indent="0" marL="0" marR="0"/>
+            <a:r>
+              <a:rPr sz="1100" b="1" i="0" lang="en">
+                <a:solidFill>
+                  <a:srgbClr val="4FBF8F"/>
+                </a:solidFill>
+                <a:latin typeface="Arial"/>
+                <a:ea typeface="Arial"/>
+                <a:cs typeface="Arial"/>
+              </a:rPr>
+              <a:t>local-inference — Railway service</a:t>
+            </a:r>
+          </a:p>
+          <a:p>
+            <a:pPr algn="ctr" indent="0" marL="0" marR="0">
+              <a:spcBef>
+                <a:spcPts val="200"/>
+              </a:spcBef>
+            </a:pPr>
+            <a:r>
+              <a:rPr sz="850" b="0" i="0" lang="en">
+                <a:solidFill>
+                  <a:srgbClr val="E6E9EF"/>
+                </a:solidFill>
+                <a:latin typeface="Arial"/>
+                <a:ea typeface="Arial"/>
+                <a:cs typeface="Arial"/>
+              </a:rPr>
+              <a:t>FastAPI: NLLB + faster-whisper + Piper · no DB access · private network + shared secret</a:t>
+            </a:r>
+          </a:p>
+        </p:txBody>
+      </p:sp>
+      <p:sp>
+        <p:nvSpPr>
+          <p:cNvPr id="1025" name="Text 1025"/>
+          <p:cNvSpPr txBox="1"/>
+          <p:nvPr/>
+        </p:nvSpPr>
+        <p:spPr>
+          <a:xfrm>
+            <a:off x="411491" y="4918665"/>
+            <a:ext cx="8298300" cy="180000"/>
+          </a:xfrm>
+          <a:prstGeom prst="rect">
+            <a:avLst/>
+          </a:prstGeom>
+          <a:noFill/>
+        </p:spPr>
+        <p:txBody>
+          <a:bodyPr wrap="square" anchor="t" lIns="0" rIns="0" tIns="0" bIns="0">
+            <a:noAutofit/>
+          </a:bodyPr>
+          <a:lstStyle/>
+          <a:p>
+            <a:pPr algn="ctr" indent="0" marL="0" marR="0"/>
+            <a:r>
+              <a:rPr sz="800" b="0" i="0" lang="en">
+                <a:solidFill>
+                  <a:srgbClr val="8B93A3"/>
+                </a:solidFill>
+                <a:latin typeface="Arial"/>
+                <a:ea typeface="Arial"/>
+                <a:cs typeface="Arial"/>
+              </a:rPr>
+              <a:t>Docker Compose runs both services + Postgres + a local LiveKit dev server locally with one command.</a:t>
+            </a:r>
+          </a:p>
+        </p:txBody>
+      </p:sp>
+    </p:spTree>
+  </p:cSld>
+  <p:clrMapOvr>
+    <a:masterClrMapping/>
+  </p:clrMapOvr>
+</p:sld>
+</file>
+
 <file path=ppt/theme/theme1.xml><?xml version="1.0" encoding="utf-8"?>
 <a:theme xmlns:a="http://schemas.openxmlformats.org/drawingml/2006/main" xmlns:r="http://schemas.openxmlformats.org/officeDocument/2006/relationships" name="Office Theme">
   <a:themeElements>
